--- a/docs/Final_Presentation.pptx
+++ b/docs/Final_Presentation.pptx
@@ -14,11 +14,9 @@
     <p:sldId id="262" r:id="rId8"/>
     <p:sldId id="263" r:id="rId9"/>
     <p:sldId id="264" r:id="rId10"/>
-    <p:sldId id="265" r:id="rId11"/>
-    <p:sldId id="266" r:id="rId12"/>
-    <p:sldId id="267" r:id="rId13"/>
-    <p:sldId id="268" r:id="rId14"/>
-    <p:sldId id="260" r:id="rId15"/>
+    <p:sldId id="266" r:id="rId11"/>
+    <p:sldId id="260" r:id="rId12"/>
+    <p:sldId id="271" r:id="rId13"/>
   </p:sldIdLst>
   <p:sldSz cx="12192000" cy="6858000"/>
   <p:notesSz cx="6858000" cy="9144000"/>
@@ -1032,8 +1030,8 @@
             </a:lnSpc>
           </a:pPr>
           <a:r>
-            <a:rPr lang="en-US"/>
-            <a:t>Evaluating the tradeoffs in power, efficiency and cost in cloud infrastructures.</a:t>
+            <a:rPr lang="en-US" dirty="0"/>
+            <a:t>Evaluating the trade-offs in power, efficiency and cost in cloud infrastructures.</a:t>
           </a:r>
         </a:p>
       </dgm:t>
@@ -1339,8 +1337,8 @@
             <a:buNone/>
           </a:pPr>
           <a:r>
-            <a:rPr lang="en-US" sz="1500" kern="1200"/>
-            <a:t>Evaluating the tradeoffs in power, efficiency and cost in cloud infrastructures.</a:t>
+            <a:rPr lang="en-US" sz="1500" kern="1200" dirty="0"/>
+            <a:t>Evaluating the trade-offs in power, efficiency and cost in cloud infrastructures.</a:t>
           </a:r>
         </a:p>
       </dsp:txBody>
@@ -2840,7 +2838,7 @@
           <a:p>
             <a:fld id="{C128FA71-3A18-48C0-980F-4B68F7F63042}" type="datetime1">
               <a:rPr lang="en-US" smtClean="0"/>
-              <a:t>4/24/2026</a:t>
+              <a:t>5/3/2026</a:t>
             </a:fld>
             <a:endParaRPr lang="en-US"/>
           </a:p>
@@ -3048,7 +3046,7 @@
           <a:p>
             <a:fld id="{7104EDB3-C0E8-45F8-9E1D-1B6C8D1880C0}" type="datetime1">
               <a:rPr lang="en-US" smtClean="0"/>
-              <a:t>4/24/2026</a:t>
+              <a:t>5/3/2026</a:t>
             </a:fld>
             <a:endParaRPr lang="en-US"/>
           </a:p>
@@ -3258,7 +3256,7 @@
           <a:p>
             <a:fld id="{9CF0EC4B-54ED-4041-B552-9BA760FA3DBA}" type="datetime1">
               <a:rPr lang="en-US" smtClean="0"/>
-              <a:t>4/24/2026</a:t>
+              <a:t>5/3/2026</a:t>
             </a:fld>
             <a:endParaRPr lang="en-US"/>
           </a:p>
@@ -3456,7 +3454,7 @@
           <a:p>
             <a:fld id="{51C1210E-201E-4473-82AC-2466F5386C38}" type="datetime1">
               <a:rPr lang="en-US" smtClean="0"/>
-              <a:t>4/24/2026</a:t>
+              <a:t>5/3/2026</a:t>
             </a:fld>
             <a:endParaRPr lang="en-US"/>
           </a:p>
@@ -3734,7 +3732,7 @@
           <a:p>
             <a:fld id="{B01EA198-6CAB-4B8F-B93F-1F9C8C4B6CE7}" type="datetime1">
               <a:rPr lang="en-US" smtClean="0"/>
-              <a:t>4/24/2026</a:t>
+              <a:t>5/3/2026</a:t>
             </a:fld>
             <a:endParaRPr lang="en-US"/>
           </a:p>
@@ -4006,7 +4004,7 @@
           <a:p>
             <a:fld id="{CA06041F-4525-44D5-AA4F-332294BF1F56}" type="datetime1">
               <a:rPr lang="en-US" smtClean="0"/>
-              <a:t>4/24/2026</a:t>
+              <a:t>5/3/2026</a:t>
             </a:fld>
             <a:endParaRPr lang="en-US"/>
           </a:p>
@@ -4430,7 +4428,7 @@
           <a:p>
             <a:fld id="{F9557091-BBDF-4EB9-BA6B-2BB67AC4FC0F}" type="datetime1">
               <a:rPr lang="en-US" smtClean="0"/>
-              <a:t>4/24/2026</a:t>
+              <a:t>5/3/2026</a:t>
             </a:fld>
             <a:endParaRPr lang="en-US"/>
           </a:p>
@@ -4571,7 +4569,7 @@
           <a:p>
             <a:fld id="{2D6B226B-77A6-410C-9796-083F278E0125}" type="datetime1">
               <a:rPr lang="en-US" smtClean="0"/>
-              <a:t>4/24/2026</a:t>
+              <a:t>5/3/2026</a:t>
             </a:fld>
             <a:endParaRPr lang="en-US"/>
           </a:p>
@@ -4684,7 +4682,7 @@
           <a:p>
             <a:fld id="{A23A578B-D289-4C40-8593-3D356C49DA58}" type="datetime1">
               <a:rPr lang="en-US" smtClean="0"/>
-              <a:t>4/24/2026</a:t>
+              <a:t>5/3/2026</a:t>
             </a:fld>
             <a:endParaRPr lang="en-US"/>
           </a:p>
@@ -5003,7 +5001,7 @@
           <a:p>
             <a:fld id="{713DFAE3-14DB-48A7-A80F-80DDB072CE3D}" type="datetime1">
               <a:rPr lang="en-US" smtClean="0"/>
-              <a:t>4/24/2026</a:t>
+              <a:t>5/3/2026</a:t>
             </a:fld>
             <a:endParaRPr lang="en-US"/>
           </a:p>
@@ -5297,7 +5295,7 @@
           <a:p>
             <a:fld id="{92C5EAEF-6478-4102-8F5D-A5FE9FC97ACB}" type="datetime1">
               <a:rPr lang="en-US" smtClean="0"/>
-              <a:t>4/24/2026</a:t>
+              <a:t>5/3/2026</a:t>
             </a:fld>
             <a:endParaRPr lang="en-US"/>
           </a:p>
@@ -5538,7 +5536,7 @@
           <a:p>
             <a:fld id="{67F45AC6-C491-4585-A584-9CE2AF7D5500}" type="datetime1">
               <a:rPr lang="en-US" smtClean="0"/>
-              <a:t>4/24/2026</a:t>
+              <a:t>5/3/2026</a:t>
             </a:fld>
             <a:endParaRPr lang="en-US"/>
           </a:p>
@@ -6381,10 +6379,10 @@
       </p:grpSpPr>
       <p:pic>
         <p:nvPicPr>
-          <p:cNvPr id="5" name="Picture 4" descr="Geometric white clouds on a blue sky">
-            <a:extLst>
-              <a:ext uri="{FF2B5EF4-FFF2-40B4-BE49-F238E27FC236}">
-                <a16:creationId xmlns:a16="http://schemas.microsoft.com/office/drawing/2014/main" id="{6201A7DA-660B-EB1F-2DD0-99C7EA7F7138}"/>
+          <p:cNvPr id="9" name="Picture 8" descr="Geometric white clouds on a blue sky">
+            <a:extLst>
+              <a:ext uri="{FF2B5EF4-FFF2-40B4-BE49-F238E27FC236}">
+                <a16:creationId xmlns:a16="http://schemas.microsoft.com/office/drawing/2014/main" id="{65DB2299-9F86-105F-F542-2BB751EFE685}"/>
               </a:ext>
             </a:extLst>
           </p:cNvPr>
@@ -6417,7 +6415,7 @@
           <p:cNvPr id="2" name="Title 1">
             <a:extLst>
               <a:ext uri="{FF2B5EF4-FFF2-40B4-BE49-F238E27FC236}">
-                <a16:creationId xmlns:a16="http://schemas.microsoft.com/office/drawing/2014/main" id="{87F03C6F-E685-DF19-43DC-7629DD450AB7}"/>
+                <a16:creationId xmlns:a16="http://schemas.microsoft.com/office/drawing/2014/main" id="{2F91103E-8092-0AEF-AF93-EAC9FED48E93}"/>
               </a:ext>
             </a:extLst>
           </p:cNvPr>
@@ -6430,22 +6428,22 @@
         </p:nvSpPr>
         <p:spPr/>
         <p:txBody>
-          <a:bodyPr anchor="b"/>
+          <a:bodyPr anchor="ctr"/>
           <a:lstStyle/>
           <a:p>
             <a:r>
               <a:rPr lang="en-US" dirty="0"/>
-              <a:t>Code Snippets</a:t>
+              <a:t>Energy Evaluation Metrics</a:t>
             </a:r>
           </a:p>
         </p:txBody>
       </p:sp>
       <p:sp>
         <p:nvSpPr>
-          <p:cNvPr id="3" name="Content Placeholder 2">
-            <a:extLst>
-              <a:ext uri="{FF2B5EF4-FFF2-40B4-BE49-F238E27FC236}">
-                <a16:creationId xmlns:a16="http://schemas.microsoft.com/office/drawing/2014/main" id="{6052A60D-F8AB-3BE9-5A79-E54E9234669A}"/>
+          <p:cNvPr id="5" name="Text Placeholder 4">
+            <a:extLst>
+              <a:ext uri="{FF2B5EF4-FFF2-40B4-BE49-F238E27FC236}">
+                <a16:creationId xmlns:a16="http://schemas.microsoft.com/office/drawing/2014/main" id="{EDBD80B6-870B-42CA-67AA-FD2C8EF9526E}"/>
               </a:ext>
             </a:extLst>
           </p:cNvPr>
@@ -6453,7 +6451,7 @@
             <a:spLocks noGrp="1"/>
           </p:cNvSpPr>
           <p:nvPr>
-            <p:ph sz="half" idx="1"/>
+            <p:ph type="body" idx="1"/>
           </p:nvPr>
         </p:nvSpPr>
         <p:spPr/>
@@ -6461,16 +6459,19 @@
           <a:bodyPr/>
           <a:lstStyle/>
           <a:p>
-            <a:endParaRPr lang="en-US"/>
+            <a:r>
+              <a:rPr lang="en-US" dirty="0"/>
+              <a:t>Operational Cost</a:t>
+            </a:r>
           </a:p>
         </p:txBody>
       </p:sp>
       <p:sp>
         <p:nvSpPr>
-          <p:cNvPr id="4" name="Content Placeholder 3">
-            <a:extLst>
-              <a:ext uri="{FF2B5EF4-FFF2-40B4-BE49-F238E27FC236}">
-                <a16:creationId xmlns:a16="http://schemas.microsoft.com/office/drawing/2014/main" id="{1C30BB9B-0ECF-954D-180D-133839FACB8E}"/>
+          <p:cNvPr id="6" name="Content Placeholder 5">
+            <a:extLst>
+              <a:ext uri="{FF2B5EF4-FFF2-40B4-BE49-F238E27FC236}">
+                <a16:creationId xmlns:a16="http://schemas.microsoft.com/office/drawing/2014/main" id="{06EC66C7-D8C3-78C4-2232-6FE5DF022A13}"/>
               </a:ext>
             </a:extLst>
           </p:cNvPr>
@@ -6479,6 +6480,93 @@
           </p:cNvSpPr>
           <p:nvPr>
             <p:ph sz="half" idx="2"/>
+          </p:nvPr>
+        </p:nvSpPr>
+        <p:spPr/>
+        <p:txBody>
+          <a:bodyPr>
+            <a:normAutofit/>
+          </a:bodyPr>
+          <a:lstStyle/>
+          <a:p>
+            <a:r>
+              <a:rPr lang="en-US" b="1" dirty="0"/>
+              <a:t>Total energy consumption (E) </a:t>
+            </a:r>
+            <a:r>
+              <a:rPr lang="en-US" dirty="0"/>
+              <a:t>= </a:t>
+            </a:r>
+            <a:br>
+              <a:rPr lang="en-US" dirty="0"/>
+            </a:br>
+            <a:r>
+              <a:rPr lang="en-US" i="1" dirty="0"/>
+              <a:t>(Execution time × Max Active Power) × 100</a:t>
+            </a:r>
+          </a:p>
+          <a:p>
+            <a:pPr lvl="1"/>
+            <a:r>
+              <a:rPr lang="en-US" dirty="0"/>
+              <a:t>Legacy = 1,460,000 J</a:t>
+            </a:r>
+          </a:p>
+          <a:p>
+            <a:pPr lvl="1"/>
+            <a:r>
+              <a:rPr lang="en-US" dirty="0"/>
+              <a:t>Modern = 902,000 J</a:t>
+            </a:r>
+          </a:p>
+          <a:p>
+            <a:pPr lvl="1"/>
+            <a:r>
+              <a:rPr lang="en-US" dirty="0"/>
+              <a:t>AI = 220,800 J</a:t>
+            </a:r>
+          </a:p>
+          <a:p>
+            <a:r>
+              <a:rPr lang="en-US" b="1" dirty="0"/>
+              <a:t>Cost</a:t>
+            </a:r>
+            <a:r>
+              <a:rPr lang="en-US" dirty="0"/>
+              <a:t> = </a:t>
+            </a:r>
+            <a:r>
+              <a:rPr lang="en-US" i="1" dirty="0"/>
+              <a:t>E × Rate</a:t>
+            </a:r>
+          </a:p>
+          <a:p>
+            <a:pPr lvl="1"/>
+            <a:r>
+              <a:rPr lang="en-US" dirty="0"/>
+              <a:t>GA Power Commercial Rate: estimated at </a:t>
+            </a:r>
+            <a:r>
+              <a:rPr lang="en-US" b="1" dirty="0"/>
+              <a:t>$0.115 per kilowatt-hour </a:t>
+            </a:r>
+          </a:p>
+        </p:txBody>
+      </p:sp>
+      <p:sp>
+        <p:nvSpPr>
+          <p:cNvPr id="7" name="Text Placeholder 6">
+            <a:extLst>
+              <a:ext uri="{FF2B5EF4-FFF2-40B4-BE49-F238E27FC236}">
+                <a16:creationId xmlns:a16="http://schemas.microsoft.com/office/drawing/2014/main" id="{97754114-998C-D916-13F9-4C94FD6A1F20}"/>
+              </a:ext>
+            </a:extLst>
+          </p:cNvPr>
+          <p:cNvSpPr>
+            <a:spLocks noGrp="1"/>
+          </p:cNvSpPr>
+          <p:nvPr>
+            <p:ph type="body" sz="quarter" idx="3"/>
           </p:nvPr>
         </p:nvSpPr>
         <p:spPr/>
@@ -6486,178 +6574,9 @@
           <a:bodyPr/>
           <a:lstStyle/>
           <a:p>
-            <a:endParaRPr lang="en-US"/>
-          </a:p>
-        </p:txBody>
-      </p:sp>
-    </p:spTree>
-    <p:extLst>
-      <p:ext uri="{BB962C8B-B14F-4D97-AF65-F5344CB8AC3E}">
-        <p14:creationId xmlns:p14="http://schemas.microsoft.com/office/powerpoint/2010/main" val="2883727534"/>
-      </p:ext>
-    </p:extLst>
-  </p:cSld>
-  <p:clrMapOvr>
-    <a:masterClrMapping/>
-  </p:clrMapOvr>
-</p:sld>
-</file>
-
-<file path=ppt/slides/slide11.xml><?xml version="1.0" encoding="utf-8"?>
-<p:sld xmlns:a="http://schemas.openxmlformats.org/drawingml/2006/main" xmlns:r="http://schemas.openxmlformats.org/officeDocument/2006/relationships" xmlns:p="http://schemas.openxmlformats.org/presentationml/2006/main">
-  <p:cSld>
-    <p:spTree>
-      <p:nvGrpSpPr>
-        <p:cNvPr id="1" name=""/>
-        <p:cNvGrpSpPr/>
-        <p:nvPr/>
-      </p:nvGrpSpPr>
-      <p:grpSpPr>
-        <a:xfrm>
-          <a:off x="0" y="0"/>
-          <a:ext cx="0" cy="0"/>
-          <a:chOff x="0" y="0"/>
-          <a:chExt cx="0" cy="0"/>
-        </a:xfrm>
-      </p:grpSpPr>
-      <p:pic>
-        <p:nvPicPr>
-          <p:cNvPr id="9" name="Picture 8" descr="Geometric white clouds on a blue sky">
-            <a:extLst>
-              <a:ext uri="{FF2B5EF4-FFF2-40B4-BE49-F238E27FC236}">
-                <a16:creationId xmlns:a16="http://schemas.microsoft.com/office/drawing/2014/main" id="{65DB2299-9F86-105F-F542-2BB751EFE685}"/>
-              </a:ext>
-            </a:extLst>
-          </p:cNvPr>
-          <p:cNvPicPr>
-            <a:picLocks noChangeAspect="1"/>
-          </p:cNvPicPr>
-          <p:nvPr/>
-        </p:nvPicPr>
-        <p:blipFill>
-          <a:blip r:embed="rId2">
-            <a:alphaModFix amt="35000"/>
-          </a:blip>
-          <a:srcRect b="46321"/>
-          <a:stretch>
-            <a:fillRect/>
-          </a:stretch>
-        </p:blipFill>
-        <p:spPr>
-          <a:xfrm>
-            <a:off x="20" y="10"/>
-            <a:ext cx="12191980" cy="6857990"/>
-          </a:xfrm>
-          <a:prstGeom prst="rect">
-            <a:avLst/>
-          </a:prstGeom>
-        </p:spPr>
-      </p:pic>
-      <p:sp>
-        <p:nvSpPr>
-          <p:cNvPr id="2" name="Title 1">
-            <a:extLst>
-              <a:ext uri="{FF2B5EF4-FFF2-40B4-BE49-F238E27FC236}">
-                <a16:creationId xmlns:a16="http://schemas.microsoft.com/office/drawing/2014/main" id="{2F91103E-8092-0AEF-AF93-EAC9FED48E93}"/>
-              </a:ext>
-            </a:extLst>
-          </p:cNvPr>
-          <p:cNvSpPr>
-            <a:spLocks noGrp="1"/>
-          </p:cNvSpPr>
-          <p:nvPr>
-            <p:ph type="title"/>
-          </p:nvPr>
-        </p:nvSpPr>
-        <p:spPr/>
-        <p:txBody>
-          <a:bodyPr anchor="b"/>
-          <a:lstStyle/>
-          <a:p>
             <a:r>
               <a:rPr lang="en-US" dirty="0"/>
-              <a:t>Program Output</a:t>
-            </a:r>
-          </a:p>
-        </p:txBody>
-      </p:sp>
-      <p:sp>
-        <p:nvSpPr>
-          <p:cNvPr id="5" name="Text Placeholder 4">
-            <a:extLst>
-              <a:ext uri="{FF2B5EF4-FFF2-40B4-BE49-F238E27FC236}">
-                <a16:creationId xmlns:a16="http://schemas.microsoft.com/office/drawing/2014/main" id="{EDBD80B6-870B-42CA-67AA-FD2C8EF9526E}"/>
-              </a:ext>
-            </a:extLst>
-          </p:cNvPr>
-          <p:cNvSpPr>
-            <a:spLocks noGrp="1"/>
-          </p:cNvSpPr>
-          <p:nvPr>
-            <p:ph type="body" idx="1"/>
-          </p:nvPr>
-        </p:nvSpPr>
-        <p:spPr/>
-        <p:txBody>
-          <a:bodyPr/>
-          <a:lstStyle/>
-          <a:p>
-            <a:r>
-              <a:rPr lang="en-US" dirty="0"/>
-              <a:t>Simplified Program</a:t>
-            </a:r>
-          </a:p>
-        </p:txBody>
-      </p:sp>
-      <p:sp>
-        <p:nvSpPr>
-          <p:cNvPr id="6" name="Content Placeholder 5">
-            <a:extLst>
-              <a:ext uri="{FF2B5EF4-FFF2-40B4-BE49-F238E27FC236}">
-                <a16:creationId xmlns:a16="http://schemas.microsoft.com/office/drawing/2014/main" id="{06EC66C7-D8C3-78C4-2232-6FE5DF022A13}"/>
-              </a:ext>
-            </a:extLst>
-          </p:cNvPr>
-          <p:cNvSpPr>
-            <a:spLocks noGrp="1"/>
-          </p:cNvSpPr>
-          <p:nvPr>
-            <p:ph sz="half" idx="2"/>
-          </p:nvPr>
-        </p:nvSpPr>
-        <p:spPr/>
-        <p:txBody>
-          <a:bodyPr/>
-          <a:lstStyle/>
-          <a:p>
-            <a:endParaRPr lang="en-US"/>
-          </a:p>
-        </p:txBody>
-      </p:sp>
-      <p:sp>
-        <p:nvSpPr>
-          <p:cNvPr id="7" name="Text Placeholder 6">
-            <a:extLst>
-              <a:ext uri="{FF2B5EF4-FFF2-40B4-BE49-F238E27FC236}">
-                <a16:creationId xmlns:a16="http://schemas.microsoft.com/office/drawing/2014/main" id="{97754114-998C-D916-13F9-4C94FD6A1F20}"/>
-              </a:ext>
-            </a:extLst>
-          </p:cNvPr>
-          <p:cNvSpPr>
-            <a:spLocks noGrp="1"/>
-          </p:cNvSpPr>
-          <p:nvPr>
-            <p:ph type="body" sz="quarter" idx="3"/>
-          </p:nvPr>
-        </p:nvSpPr>
-        <p:spPr/>
-        <p:txBody>
-          <a:bodyPr/>
-          <a:lstStyle/>
-          <a:p>
-            <a:r>
-              <a:rPr lang="en-US" dirty="0"/>
-              <a:t>Multi-Host Program in Power BI</a:t>
+              <a:t>Hardware cost</a:t>
             </a:r>
           </a:p>
         </p:txBody>
@@ -6680,10 +6599,74 @@
         </p:nvSpPr>
         <p:spPr/>
         <p:txBody>
-          <a:bodyPr/>
+          <a:bodyPr>
+            <a:normAutofit/>
+          </a:bodyPr>
           <a:lstStyle/>
           <a:p>
-            <a:endParaRPr lang="en-US"/>
+            <a:r>
+              <a:rPr lang="en-US" b="1" dirty="0"/>
+              <a:t>Power Usage Effectiveness </a:t>
+            </a:r>
+            <a:r>
+              <a:rPr lang="en-US" dirty="0"/>
+              <a:t>= </a:t>
+            </a:r>
+            <a:br>
+              <a:rPr lang="en-US" dirty="0"/>
+            </a:br>
+            <a:r>
+              <a:rPr lang="en-US" i="1" dirty="0"/>
+              <a:t>Data center energy / Server energy</a:t>
+            </a:r>
+          </a:p>
+          <a:p>
+            <a:pPr lvl="1"/>
+            <a:r>
+              <a:rPr lang="en-US" dirty="0"/>
+              <a:t>Legacy = 2.5 PUE </a:t>
+            </a:r>
+          </a:p>
+          <a:p>
+            <a:pPr lvl="1"/>
+            <a:r>
+              <a:rPr lang="en-US" dirty="0"/>
+              <a:t>Modern = 1.58 PUE </a:t>
+            </a:r>
+          </a:p>
+          <a:p>
+            <a:pPr lvl="1"/>
+            <a:r>
+              <a:rPr lang="en-US" dirty="0"/>
+              <a:t>AI = 1.56 PUE </a:t>
+            </a:r>
+          </a:p>
+          <a:p>
+            <a:r>
+              <a:rPr lang="en-US" dirty="0"/>
+              <a:t>Estimated physical hardware costs</a:t>
+            </a:r>
+          </a:p>
+          <a:p>
+            <a:pPr lvl="1"/>
+            <a:r>
+              <a:rPr lang="en-US" dirty="0"/>
+              <a:t>Legacy = $56,000</a:t>
+            </a:r>
+          </a:p>
+          <a:p>
+            <a:pPr lvl="1"/>
+            <a:r>
+              <a:rPr lang="en-US" dirty="0"/>
+              <a:t>Modern = $650,000</a:t>
+            </a:r>
+          </a:p>
+          <a:p>
+            <a:pPr lvl="1"/>
+            <a:r>
+              <a:rPr lang="en-US" dirty="0"/>
+              <a:t>AI = $15,000,000</a:t>
+            </a:r>
           </a:p>
         </p:txBody>
       </p:sp>
@@ -6700,320 +6683,7 @@
 </p:sld>
 </file>
 
-<file path=ppt/slides/slide12.xml><?xml version="1.0" encoding="utf-8"?>
-<p:sld xmlns:a="http://schemas.openxmlformats.org/drawingml/2006/main" xmlns:r="http://schemas.openxmlformats.org/officeDocument/2006/relationships" xmlns:p="http://schemas.openxmlformats.org/presentationml/2006/main">
-  <p:cSld>
-    <p:spTree>
-      <p:nvGrpSpPr>
-        <p:cNvPr id="1" name=""/>
-        <p:cNvGrpSpPr/>
-        <p:nvPr/>
-      </p:nvGrpSpPr>
-      <p:grpSpPr>
-        <a:xfrm>
-          <a:off x="0" y="0"/>
-          <a:ext cx="0" cy="0"/>
-          <a:chOff x="0" y="0"/>
-          <a:chExt cx="0" cy="0"/>
-        </a:xfrm>
-      </p:grpSpPr>
-      <p:pic>
-        <p:nvPicPr>
-          <p:cNvPr id="9" name="Picture 8" descr="Geometric white clouds on a blue sky">
-            <a:extLst>
-              <a:ext uri="{FF2B5EF4-FFF2-40B4-BE49-F238E27FC236}">
-                <a16:creationId xmlns:a16="http://schemas.microsoft.com/office/drawing/2014/main" id="{FFDCE1C1-EFFF-5FBB-431C-C8E22EBF7B09}"/>
-              </a:ext>
-            </a:extLst>
-          </p:cNvPr>
-          <p:cNvPicPr>
-            <a:picLocks noChangeAspect="1"/>
-          </p:cNvPicPr>
-          <p:nvPr/>
-        </p:nvPicPr>
-        <p:blipFill>
-          <a:blip r:embed="rId2">
-            <a:alphaModFix amt="35000"/>
-          </a:blip>
-          <a:srcRect b="46321"/>
-          <a:stretch>
-            <a:fillRect/>
-          </a:stretch>
-        </p:blipFill>
-        <p:spPr>
-          <a:xfrm>
-            <a:off x="20" y="10"/>
-            <a:ext cx="12191980" cy="6857990"/>
-          </a:xfrm>
-          <a:prstGeom prst="rect">
-            <a:avLst/>
-          </a:prstGeom>
-        </p:spPr>
-      </p:pic>
-      <p:sp>
-        <p:nvSpPr>
-          <p:cNvPr id="7" name="Title 6">
-            <a:extLst>
-              <a:ext uri="{FF2B5EF4-FFF2-40B4-BE49-F238E27FC236}">
-                <a16:creationId xmlns:a16="http://schemas.microsoft.com/office/drawing/2014/main" id="{087E4018-9225-0DAA-8902-7D71D442DC2E}"/>
-              </a:ext>
-            </a:extLst>
-          </p:cNvPr>
-          <p:cNvSpPr>
-            <a:spLocks noGrp="1"/>
-          </p:cNvSpPr>
-          <p:nvPr>
-            <p:ph type="title"/>
-          </p:nvPr>
-        </p:nvSpPr>
-        <p:spPr/>
-        <p:txBody>
-          <a:bodyPr anchor="b"/>
-          <a:lstStyle/>
-          <a:p>
-            <a:r>
-              <a:rPr lang="en-US" dirty="0"/>
-              <a:t>Energy Evaluation</a:t>
-            </a:r>
-          </a:p>
-        </p:txBody>
-      </p:sp>
-      <p:sp>
-        <p:nvSpPr>
-          <p:cNvPr id="8" name="Content Placeholder 7">
-            <a:extLst>
-              <a:ext uri="{FF2B5EF4-FFF2-40B4-BE49-F238E27FC236}">
-                <a16:creationId xmlns:a16="http://schemas.microsoft.com/office/drawing/2014/main" id="{0D1E1A25-376E-0157-5C8A-44295E04289F}"/>
-              </a:ext>
-            </a:extLst>
-          </p:cNvPr>
-          <p:cNvSpPr>
-            <a:spLocks noGrp="1"/>
-          </p:cNvSpPr>
-          <p:nvPr>
-            <p:ph idx="1"/>
-          </p:nvPr>
-        </p:nvSpPr>
-        <p:spPr/>
-        <p:txBody>
-          <a:bodyPr/>
-          <a:lstStyle/>
-          <a:p>
-            <a:endParaRPr lang="en-US"/>
-          </a:p>
-        </p:txBody>
-      </p:sp>
-    </p:spTree>
-    <p:extLst>
-      <p:ext uri="{BB962C8B-B14F-4D97-AF65-F5344CB8AC3E}">
-        <p14:creationId xmlns:p14="http://schemas.microsoft.com/office/powerpoint/2010/main" val="2686881337"/>
-      </p:ext>
-    </p:extLst>
-  </p:cSld>
-  <p:clrMapOvr>
-    <a:masterClrMapping/>
-  </p:clrMapOvr>
-</p:sld>
-</file>
-
-<file path=ppt/slides/slide13.xml><?xml version="1.0" encoding="utf-8"?>
-<p:sld xmlns:a="http://schemas.openxmlformats.org/drawingml/2006/main" xmlns:r="http://schemas.openxmlformats.org/officeDocument/2006/relationships" xmlns:p="http://schemas.openxmlformats.org/presentationml/2006/main">
-  <p:cSld>
-    <p:spTree>
-      <p:nvGrpSpPr>
-        <p:cNvPr id="1" name=""/>
-        <p:cNvGrpSpPr/>
-        <p:nvPr/>
-      </p:nvGrpSpPr>
-      <p:grpSpPr>
-        <a:xfrm>
-          <a:off x="0" y="0"/>
-          <a:ext cx="0" cy="0"/>
-          <a:chOff x="0" y="0"/>
-          <a:chExt cx="0" cy="0"/>
-        </a:xfrm>
-      </p:grpSpPr>
-      <p:pic>
-        <p:nvPicPr>
-          <p:cNvPr id="13" name="Picture 12" descr="Geometric white clouds on a blue sky">
-            <a:extLst>
-              <a:ext uri="{FF2B5EF4-FFF2-40B4-BE49-F238E27FC236}">
-                <a16:creationId xmlns:a16="http://schemas.microsoft.com/office/drawing/2014/main" id="{4F17340E-A09F-592B-2741-AFF6D9FE66B5}"/>
-              </a:ext>
-            </a:extLst>
-          </p:cNvPr>
-          <p:cNvPicPr>
-            <a:picLocks noChangeAspect="1"/>
-          </p:cNvPicPr>
-          <p:nvPr/>
-        </p:nvPicPr>
-        <p:blipFill>
-          <a:blip r:embed="rId2">
-            <a:alphaModFix amt="35000"/>
-          </a:blip>
-          <a:srcRect b="46321"/>
-          <a:stretch>
-            <a:fillRect/>
-          </a:stretch>
-        </p:blipFill>
-        <p:spPr>
-          <a:xfrm>
-            <a:off x="20" y="10"/>
-            <a:ext cx="12191980" cy="6857990"/>
-          </a:xfrm>
-          <a:prstGeom prst="rect">
-            <a:avLst/>
-          </a:prstGeom>
-        </p:spPr>
-      </p:pic>
-      <p:sp>
-        <p:nvSpPr>
-          <p:cNvPr id="7" name="Title 6">
-            <a:extLst>
-              <a:ext uri="{FF2B5EF4-FFF2-40B4-BE49-F238E27FC236}">
-                <a16:creationId xmlns:a16="http://schemas.microsoft.com/office/drawing/2014/main" id="{6D884160-F284-0447-44B0-C02568A2278E}"/>
-              </a:ext>
-            </a:extLst>
-          </p:cNvPr>
-          <p:cNvSpPr>
-            <a:spLocks noGrp="1"/>
-          </p:cNvSpPr>
-          <p:nvPr>
-            <p:ph type="title"/>
-          </p:nvPr>
-        </p:nvSpPr>
-        <p:spPr/>
-        <p:txBody>
-          <a:bodyPr anchor="b"/>
-          <a:lstStyle/>
-          <a:p>
-            <a:r>
-              <a:rPr lang="en-US" dirty="0"/>
-              <a:t>Cost Estimations</a:t>
-            </a:r>
-          </a:p>
-        </p:txBody>
-      </p:sp>
-      <p:sp>
-        <p:nvSpPr>
-          <p:cNvPr id="9" name="Text Placeholder 8">
-            <a:extLst>
-              <a:ext uri="{FF2B5EF4-FFF2-40B4-BE49-F238E27FC236}">
-                <a16:creationId xmlns:a16="http://schemas.microsoft.com/office/drawing/2014/main" id="{70A29FB1-B58D-97A9-863A-2844A965BCC5}"/>
-              </a:ext>
-            </a:extLst>
-          </p:cNvPr>
-          <p:cNvSpPr>
-            <a:spLocks noGrp="1"/>
-          </p:cNvSpPr>
-          <p:nvPr>
-            <p:ph type="body" idx="1"/>
-          </p:nvPr>
-        </p:nvSpPr>
-        <p:spPr/>
-        <p:txBody>
-          <a:bodyPr/>
-          <a:lstStyle/>
-          <a:p>
-            <a:r>
-              <a:rPr lang="en-US" dirty="0"/>
-              <a:t>Operational Costs</a:t>
-            </a:r>
-          </a:p>
-        </p:txBody>
-      </p:sp>
-      <p:sp>
-        <p:nvSpPr>
-          <p:cNvPr id="10" name="Content Placeholder 9">
-            <a:extLst>
-              <a:ext uri="{FF2B5EF4-FFF2-40B4-BE49-F238E27FC236}">
-                <a16:creationId xmlns:a16="http://schemas.microsoft.com/office/drawing/2014/main" id="{1C527891-7651-C014-C901-47FA0DCE59C2}"/>
-              </a:ext>
-            </a:extLst>
-          </p:cNvPr>
-          <p:cNvSpPr>
-            <a:spLocks noGrp="1"/>
-          </p:cNvSpPr>
-          <p:nvPr>
-            <p:ph sz="half" idx="2"/>
-          </p:nvPr>
-        </p:nvSpPr>
-        <p:spPr/>
-        <p:txBody>
-          <a:bodyPr/>
-          <a:lstStyle/>
-          <a:p>
-            <a:endParaRPr lang="en-US"/>
-          </a:p>
-        </p:txBody>
-      </p:sp>
-      <p:sp>
-        <p:nvSpPr>
-          <p:cNvPr id="11" name="Text Placeholder 10">
-            <a:extLst>
-              <a:ext uri="{FF2B5EF4-FFF2-40B4-BE49-F238E27FC236}">
-                <a16:creationId xmlns:a16="http://schemas.microsoft.com/office/drawing/2014/main" id="{AFA483A7-5549-16DA-9FEA-1F6977300369}"/>
-              </a:ext>
-            </a:extLst>
-          </p:cNvPr>
-          <p:cNvSpPr>
-            <a:spLocks noGrp="1"/>
-          </p:cNvSpPr>
-          <p:nvPr>
-            <p:ph type="body" sz="quarter" idx="3"/>
-          </p:nvPr>
-        </p:nvSpPr>
-        <p:spPr/>
-        <p:txBody>
-          <a:bodyPr/>
-          <a:lstStyle/>
-          <a:p>
-            <a:r>
-              <a:rPr lang="en-US" dirty="0"/>
-              <a:t>Hardware Costs</a:t>
-            </a:r>
-          </a:p>
-        </p:txBody>
-      </p:sp>
-      <p:sp>
-        <p:nvSpPr>
-          <p:cNvPr id="12" name="Content Placeholder 11">
-            <a:extLst>
-              <a:ext uri="{FF2B5EF4-FFF2-40B4-BE49-F238E27FC236}">
-                <a16:creationId xmlns:a16="http://schemas.microsoft.com/office/drawing/2014/main" id="{FF8CC6FA-C16B-5575-C8F5-E581A23C1341}"/>
-              </a:ext>
-            </a:extLst>
-          </p:cNvPr>
-          <p:cNvSpPr>
-            <a:spLocks noGrp="1"/>
-          </p:cNvSpPr>
-          <p:nvPr>
-            <p:ph sz="quarter" idx="4"/>
-          </p:nvPr>
-        </p:nvSpPr>
-        <p:spPr/>
-        <p:txBody>
-          <a:bodyPr/>
-          <a:lstStyle/>
-          <a:p>
-            <a:endParaRPr lang="en-US"/>
-          </a:p>
-        </p:txBody>
-      </p:sp>
-    </p:spTree>
-    <p:extLst>
-      <p:ext uri="{BB962C8B-B14F-4D97-AF65-F5344CB8AC3E}">
-        <p14:creationId xmlns:p14="http://schemas.microsoft.com/office/powerpoint/2010/main" val="2947818619"/>
-      </p:ext>
-    </p:extLst>
-  </p:cSld>
-  <p:clrMapOvr>
-    <a:masterClrMapping/>
-  </p:clrMapOvr>
-</p:sld>
-</file>
-
-<file path=ppt/slides/slide14.xml><?xml version="1.0" encoding="utf-8"?>
+<file path=ppt/slides/slide11.xml><?xml version="1.0" encoding="utf-8"?>
 <p:sld xmlns:a="http://schemas.openxmlformats.org/drawingml/2006/main" xmlns:r="http://schemas.openxmlformats.org/officeDocument/2006/relationships" xmlns:p="http://schemas.openxmlformats.org/presentationml/2006/main">
   <p:cSld>
     <p:spTree>
@@ -7313,6 +6983,337 @@
 </p:sld>
 </file>
 
+<file path=ppt/slides/slide12.xml><?xml version="1.0" encoding="utf-8"?>
+<p:sld xmlns:a="http://schemas.openxmlformats.org/drawingml/2006/main" xmlns:r="http://schemas.openxmlformats.org/officeDocument/2006/relationships" xmlns:p="http://schemas.openxmlformats.org/presentationml/2006/main">
+  <p:cSld>
+    <p:bg>
+      <p:bgPr>
+        <a:solidFill>
+          <a:schemeClr val="bg1"/>
+        </a:solidFill>
+        <a:effectLst/>
+      </p:bgPr>
+    </p:bg>
+    <p:spTree>
+      <p:nvGrpSpPr>
+        <p:cNvPr id="1" name="">
+          <a:extLst>
+            <a:ext uri="{FF2B5EF4-FFF2-40B4-BE49-F238E27FC236}">
+              <a16:creationId xmlns:a16="http://schemas.microsoft.com/office/drawing/2014/main" id="{3F53A1FC-CDDF-5EF8-55AA-DEB9C88203E9}"/>
+            </a:ext>
+          </a:extLst>
+        </p:cNvPr>
+        <p:cNvGrpSpPr/>
+        <p:nvPr/>
+      </p:nvGrpSpPr>
+      <p:grpSpPr>
+        <a:xfrm>
+          <a:off x="0" y="0"/>
+          <a:ext cx="0" cy="0"/>
+          <a:chOff x="0" y="0"/>
+          <a:chExt cx="0" cy="0"/>
+        </a:xfrm>
+      </p:grpSpPr>
+      <p:sp useBgFill="1">
+        <p:nvSpPr>
+          <p:cNvPr id="9" name="Rectangle 8">
+            <a:extLst>
+              <a:ext uri="{FF2B5EF4-FFF2-40B4-BE49-F238E27FC236}">
+                <a16:creationId xmlns:a16="http://schemas.microsoft.com/office/drawing/2014/main" id="{2961259D-605E-E200-FF9F-7C8C71D7C8E4}"/>
+              </a:ext>
+              <a:ext uri="{C183D7F6-B498-43B3-948B-1728B52AA6E4}">
+                <adec:decorative xmlns:adec="http://schemas.microsoft.com/office/drawing/2017/decorative" val="1"/>
+              </a:ext>
+            </a:extLst>
+          </p:cNvPr>
+          <p:cNvSpPr>
+            <a:spLocks noGrp="1" noRot="1" noChangeAspect="1" noMove="1" noResize="1" noEditPoints="1" noAdjustHandles="1" noChangeArrowheads="1" noChangeShapeType="1" noTextEdit="1"/>
+          </p:cNvSpPr>
+          <p:nvPr>
+            <p:extLst>
+              <p:ext uri="{386F3935-93C4-4BCD-93E2-E3B085C9AB24}">
+                <p16:designElem xmlns:p16="http://schemas.microsoft.com/office/powerpoint/2015/main" val="1"/>
+              </p:ext>
+            </p:extLst>
+          </p:nvPr>
+        </p:nvSpPr>
+        <p:spPr>
+          <a:xfrm>
+            <a:off x="0" y="0"/>
+            <a:ext cx="12192000" cy="6858000"/>
+          </a:xfrm>
+          <a:prstGeom prst="rect">
+            <a:avLst/>
+          </a:prstGeom>
+          <a:ln w="12700" cap="flat" cmpd="sng" algn="ctr">
+            <a:noFill/>
+            <a:prstDash val="solid"/>
+            <a:miter lim="800000"/>
+          </a:ln>
+          <a:effectLst/>
+          <a:extLst>
+            <a:ext uri="{91240B29-F687-4F45-9708-019B960494DF}">
+              <a14:hiddenLine xmlns:a14="http://schemas.microsoft.com/office/drawing/2010/main" w="12700" cap="flat" cmpd="sng" algn="ctr">
+                <a:solidFill>
+                  <a:schemeClr val="accent1">
+                    <a:shade val="15000"/>
+                  </a:schemeClr>
+                </a:solidFill>
+                <a:prstDash val="solid"/>
+                <a:miter lim="800000"/>
+              </a14:hiddenLine>
+            </a:ext>
+          </a:extLst>
+        </p:spPr>
+        <p:style>
+          <a:lnRef idx="2">
+            <a:schemeClr val="accent1">
+              <a:shade val="15000"/>
+            </a:schemeClr>
+          </a:lnRef>
+          <a:fillRef idx="1">
+            <a:schemeClr val="accent1"/>
+          </a:fillRef>
+          <a:effectRef idx="0">
+            <a:schemeClr val="accent1"/>
+          </a:effectRef>
+          <a:fontRef idx="minor">
+            <a:schemeClr val="lt1"/>
+          </a:fontRef>
+        </p:style>
+        <p:txBody>
+          <a:bodyPr rtlCol="0" anchor="ctr"/>
+          <a:lstStyle/>
+          <a:p>
+            <a:pPr algn="ctr"/>
+            <a:endParaRPr lang="en-US"/>
+          </a:p>
+        </p:txBody>
+      </p:sp>
+      <p:sp>
+        <p:nvSpPr>
+          <p:cNvPr id="2" name="Title 1">
+            <a:extLst>
+              <a:ext uri="{FF2B5EF4-FFF2-40B4-BE49-F238E27FC236}">
+                <a16:creationId xmlns:a16="http://schemas.microsoft.com/office/drawing/2014/main" id="{B4E2143B-FF0C-F638-FCC3-785657EA5568}"/>
+              </a:ext>
+            </a:extLst>
+          </p:cNvPr>
+          <p:cNvSpPr>
+            <a:spLocks noGrp="1"/>
+          </p:cNvSpPr>
+          <p:nvPr>
+            <p:ph type="title"/>
+          </p:nvPr>
+        </p:nvSpPr>
+        <p:spPr>
+          <a:xfrm>
+            <a:off x="612648" y="600074"/>
+            <a:ext cx="6035040" cy="1156298"/>
+          </a:xfrm>
+        </p:spPr>
+        <p:txBody>
+          <a:bodyPr anchor="b">
+            <a:normAutofit/>
+          </a:bodyPr>
+          <a:lstStyle/>
+          <a:p>
+            <a:r>
+              <a:rPr lang="en-US" dirty="0"/>
+              <a:t>Conclusion</a:t>
+            </a:r>
+          </a:p>
+        </p:txBody>
+      </p:sp>
+      <p:sp>
+        <p:nvSpPr>
+          <p:cNvPr id="3" name="Content Placeholder 2">
+            <a:extLst>
+              <a:ext uri="{FF2B5EF4-FFF2-40B4-BE49-F238E27FC236}">
+                <a16:creationId xmlns:a16="http://schemas.microsoft.com/office/drawing/2014/main" id="{1A7D0464-0B78-EC13-99FF-4221634FD343}"/>
+              </a:ext>
+            </a:extLst>
+          </p:cNvPr>
+          <p:cNvSpPr>
+            <a:spLocks noGrp="1"/>
+          </p:cNvSpPr>
+          <p:nvPr>
+            <p:ph idx="1"/>
+          </p:nvPr>
+        </p:nvSpPr>
+        <p:spPr>
+          <a:xfrm>
+            <a:off x="612647" y="1828800"/>
+            <a:ext cx="6035041" cy="4480560"/>
+          </a:xfrm>
+        </p:spPr>
+        <p:txBody>
+          <a:bodyPr>
+            <a:normAutofit/>
+          </a:bodyPr>
+          <a:lstStyle/>
+          <a:p>
+            <a:pPr>
+              <a:lnSpc>
+                <a:spcPct val="110000"/>
+              </a:lnSpc>
+            </a:pPr>
+            <a:r>
+              <a:rPr lang="en-US" sz="1600" dirty="0"/>
+              <a:t>The AI data center demonstrated superior energy efficiency, but was offset by significantly higher hardware cost </a:t>
+            </a:r>
+          </a:p>
+          <a:p>
+            <a:pPr>
+              <a:lnSpc>
+                <a:spcPct val="110000"/>
+              </a:lnSpc>
+            </a:pPr>
+            <a:r>
+              <a:rPr lang="en-US" sz="1600" dirty="0"/>
+              <a:t>The modern data center is the most practical middle ground, at least while AI hardware costs remain exorbitant</a:t>
+            </a:r>
+          </a:p>
+          <a:p>
+            <a:pPr>
+              <a:lnSpc>
+                <a:spcPct val="110000"/>
+              </a:lnSpc>
+            </a:pPr>
+            <a:r>
+              <a:rPr lang="en-US" sz="1600" dirty="0"/>
+              <a:t>Raw energy consumption alone is a misleading metric</a:t>
+            </a:r>
+          </a:p>
+          <a:p>
+            <a:pPr>
+              <a:lnSpc>
+                <a:spcPct val="110000"/>
+              </a:lnSpc>
+            </a:pPr>
+            <a:r>
+              <a:rPr lang="en-US" sz="1600" dirty="0"/>
+              <a:t>Future work can:</a:t>
+            </a:r>
+          </a:p>
+          <a:p>
+            <a:pPr lvl="1">
+              <a:lnSpc>
+                <a:spcPct val="110000"/>
+              </a:lnSpc>
+            </a:pPr>
+            <a:r>
+              <a:rPr lang="en-US" sz="1600" dirty="0"/>
+              <a:t>Incorporate software and environmental costs</a:t>
+            </a:r>
+          </a:p>
+          <a:p>
+            <a:pPr lvl="1">
+              <a:lnSpc>
+                <a:spcPct val="110000"/>
+              </a:lnSpc>
+            </a:pPr>
+            <a:r>
+              <a:rPr lang="en-US" sz="1600" dirty="0"/>
+              <a:t>Apply server cost amortization for a more long-term financial picture</a:t>
+            </a:r>
+          </a:p>
+          <a:p>
+            <a:pPr lvl="1">
+              <a:lnSpc>
+                <a:spcPct val="110000"/>
+              </a:lnSpc>
+            </a:pPr>
+            <a:r>
+              <a:rPr lang="en-US" sz="1600" dirty="0"/>
+              <a:t>Use the </a:t>
+            </a:r>
+            <a:r>
+              <a:rPr lang="en-US" sz="1600" i="1" dirty="0"/>
+              <a:t>schedulers</a:t>
+            </a:r>
+            <a:r>
+              <a:rPr lang="en-US" sz="1600" dirty="0"/>
+              <a:t> class to add server idle times</a:t>
+            </a:r>
+          </a:p>
+          <a:p>
+            <a:pPr lvl="1">
+              <a:lnSpc>
+                <a:spcPct val="110000"/>
+              </a:lnSpc>
+            </a:pPr>
+            <a:r>
+              <a:rPr lang="en-US" sz="1600" dirty="0"/>
+              <a:t>Use the </a:t>
+            </a:r>
+            <a:r>
+              <a:rPr lang="en-US" sz="1600" i="1" dirty="0" err="1"/>
+              <a:t>addOnCloudletFinishListener</a:t>
+            </a:r>
+            <a:r>
+              <a:rPr lang="en-US" sz="1600" i="1" dirty="0"/>
+              <a:t>() </a:t>
+            </a:r>
+            <a:r>
+              <a:rPr lang="en-US" sz="1600" dirty="0"/>
+              <a:t>method to allow dynamic task submission</a:t>
+            </a:r>
+          </a:p>
+          <a:p>
+            <a:pPr lvl="1">
+              <a:lnSpc>
+                <a:spcPct val="110000"/>
+              </a:lnSpc>
+            </a:pPr>
+            <a:endParaRPr lang="en-US" sz="1600" dirty="0"/>
+          </a:p>
+        </p:txBody>
+      </p:sp>
+      <p:pic>
+        <p:nvPicPr>
+          <p:cNvPr id="4" name="Picture 3" descr="Geometric white clouds on a blue sky">
+            <a:extLst>
+              <a:ext uri="{FF2B5EF4-FFF2-40B4-BE49-F238E27FC236}">
+                <a16:creationId xmlns:a16="http://schemas.microsoft.com/office/drawing/2014/main" id="{50321922-601B-FF05-3C87-68FF237D417E}"/>
+              </a:ext>
+            </a:extLst>
+          </p:cNvPr>
+          <p:cNvPicPr>
+            <a:picLocks noChangeAspect="1"/>
+          </p:cNvPicPr>
+          <p:nvPr/>
+        </p:nvPicPr>
+        <p:blipFill>
+          <a:blip r:embed="rId2"/>
+          <a:srcRect l="8023" r="38977"/>
+          <a:stretch>
+            <a:fillRect/>
+          </a:stretch>
+        </p:blipFill>
+        <p:spPr>
+          <a:xfrm>
+            <a:off x="7345680" y="10"/>
+            <a:ext cx="4846320" cy="6857990"/>
+          </a:xfrm>
+          <a:prstGeom prst="rect">
+            <a:avLst/>
+          </a:prstGeom>
+        </p:spPr>
+      </p:pic>
+    </p:spTree>
+    <p:extLst>
+      <p:ext uri="{BB962C8B-B14F-4D97-AF65-F5344CB8AC3E}">
+        <p14:creationId xmlns:p14="http://schemas.microsoft.com/office/powerpoint/2010/main" val="2310282253"/>
+      </p:ext>
+    </p:extLst>
+  </p:cSld>
+  <p:clrMapOvr>
+    <a:masterClrMapping/>
+  </p:clrMapOvr>
+</p:sld>
+</file>
+
 <file path=ppt/slides/slide2.xml><?xml version="1.0" encoding="utf-8"?>
 <p:sld xmlns:a="http://schemas.openxmlformats.org/drawingml/2006/main" xmlns:r="http://schemas.openxmlformats.org/officeDocument/2006/relationships" xmlns:p="http://schemas.openxmlformats.org/presentationml/2006/main">
   <p:cSld>
@@ -7738,7 +7739,7 @@
             <p:ph idx="1"/>
             <p:extLst>
               <p:ext uri="{D42A27DB-BD31-4B8C-83A1-F6EECF244321}">
-                <p14:modId xmlns:p14="http://schemas.microsoft.com/office/powerpoint/2010/main" val="3713965226"/>
+                <p14:modId xmlns:p14="http://schemas.microsoft.com/office/powerpoint/2010/main" val="3199537603"/>
               </p:ext>
             </p:extLst>
           </p:nvPr>
@@ -7834,7 +7835,7 @@
         </p:nvSpPr>
         <p:spPr/>
         <p:txBody>
-          <a:bodyPr anchor="b"/>
+          <a:bodyPr anchor="ctr"/>
           <a:lstStyle/>
           <a:p>
             <a:r>
@@ -7865,7 +7866,49 @@
           <a:bodyPr/>
           <a:lstStyle/>
           <a:p>
-            <a:endParaRPr lang="en-US"/>
+            <a:endParaRPr lang="en-US" dirty="0"/>
+          </a:p>
+          <a:p>
+            <a:r>
+              <a:rPr lang="en-US" dirty="0"/>
+              <a:t>The total power needed to keep data centers running is reaching record highs, in a “race to build national AI infrastructure.”</a:t>
+            </a:r>
+          </a:p>
+          <a:p>
+            <a:r>
+              <a:rPr lang="en-US" dirty="0"/>
+              <a:t>By 2030, AI data centers will account for 3% of total global electricity consumption.</a:t>
+            </a:r>
+          </a:p>
+          <a:p>
+            <a:endParaRPr lang="en-US" dirty="0"/>
+          </a:p>
+          <a:p>
+            <a:r>
+              <a:rPr lang="en-US" b="1" dirty="0"/>
+              <a:t>CloudSim Plus</a:t>
+            </a:r>
+          </a:p>
+          <a:p>
+            <a:pPr lvl="1"/>
+            <a:r>
+              <a:rPr lang="en-US" dirty="0"/>
+              <a:t>A widely used simulation framework in cloud computing research </a:t>
+            </a:r>
+          </a:p>
+          <a:p>
+            <a:pPr lvl="1"/>
+            <a:r>
+              <a:rPr lang="en-US" dirty="0"/>
+              <a:t>Popular fork of CloudSim, the first open-source specialized cloud simulation framework</a:t>
+            </a:r>
+          </a:p>
+          <a:p>
+            <a:pPr lvl="1"/>
+            <a:r>
+              <a:rPr lang="en-US" dirty="0"/>
+              <a:t>Users can specify parameters about the hardware </a:t>
+            </a:r>
           </a:p>
         </p:txBody>
       </p:sp>
@@ -7888,11 +7931,9 @@
     <p:bg>
       <p:bgPr>
         <a:solidFill>
-          <a:schemeClr val="accent1">
-            <a:lumMod val="20000"/>
-            <a:lumOff val="80000"/>
-            <a:alpha val="30000"/>
-          </a:schemeClr>
+          <a:srgbClr val="97DBF3">
+            <a:alpha val="29804"/>
+          </a:srgbClr>
         </a:solidFill>
         <a:effectLst/>
       </p:bgPr>
@@ -8142,7 +8183,7 @@
         </p:nvSpPr>
         <p:spPr/>
         <p:txBody>
-          <a:bodyPr anchor="b"/>
+          <a:bodyPr anchor="ctr"/>
           <a:lstStyle/>
           <a:p>
             <a:r>
@@ -8173,7 +8214,45 @@
           <a:bodyPr/>
           <a:lstStyle/>
           <a:p>
-            <a:endParaRPr lang="en-US"/>
+            <a:r>
+              <a:rPr lang="en-US" dirty="0"/>
+              <a:t>A comparison of 2000s, 2010s, and 2020s data centers, using CloudSim Plus to simulate each type</a:t>
+            </a:r>
+          </a:p>
+          <a:p>
+            <a:r>
+              <a:rPr lang="en-US" dirty="0"/>
+              <a:t>Collected specs for each server type, from SPECpower_ssj2008 benchmarks</a:t>
+            </a:r>
+          </a:p>
+          <a:p>
+            <a:r>
+              <a:rPr lang="en-US" dirty="0"/>
+              <a:t>Each data center has the same number of hosts (servers), and the same number of tasks to complete</a:t>
+            </a:r>
+          </a:p>
+          <a:p>
+            <a:pPr lvl="1"/>
+            <a:r>
+              <a:rPr lang="en-US" dirty="0"/>
+              <a:t>100 hosts each</a:t>
+            </a:r>
+          </a:p>
+          <a:p>
+            <a:pPr lvl="1"/>
+            <a:r>
+              <a:rPr lang="en-US" dirty="0"/>
+              <a:t>10,000 tasks each with a length of 50,000 MI (Millions of Instructions)</a:t>
+            </a:r>
+          </a:p>
+          <a:p>
+            <a:r>
+              <a:rPr lang="en-US" dirty="0"/>
+              <a:t>3 million rows of results then exported as a CSV file and analyzed in Power BI</a:t>
+            </a:r>
+          </a:p>
+          <a:p>
+            <a:endParaRPr lang="en-US" dirty="0"/>
           </a:p>
         </p:txBody>
       </p:sp>
@@ -8258,12 +8337,12 @@
         </p:nvSpPr>
         <p:spPr/>
         <p:txBody>
-          <a:bodyPr anchor="b"/>
+          <a:bodyPr anchor="ctr"/>
           <a:lstStyle/>
           <a:p>
             <a:r>
               <a:rPr lang="en-US" dirty="0"/>
-              <a:t>Legacy Data Center</a:t>
+              <a:t>Methodology - Legacy Data Center</a:t>
             </a:r>
           </a:p>
         </p:txBody>
@@ -8289,35 +8368,151 @@
           <a:bodyPr/>
           <a:lstStyle/>
           <a:p>
-            <a:endParaRPr lang="en-US"/>
+            <a:r>
+              <a:rPr lang="en-US" b="1" dirty="0"/>
+              <a:t>HP ProLiant DL360 G1</a:t>
+            </a:r>
+          </a:p>
+          <a:p>
+            <a:pPr lvl="1"/>
+            <a:r>
+              <a:rPr lang="en-US" dirty="0"/>
+              <a:t>Enterprise Server</a:t>
+            </a:r>
+          </a:p>
+          <a:p>
+            <a:pPr lvl="1"/>
+            <a:r>
+              <a:rPr lang="en-US" dirty="0"/>
+              <a:t>Benchmarked in 2000</a:t>
+            </a:r>
+          </a:p>
+          <a:p>
+            <a:r>
+              <a:rPr lang="en-US" dirty="0"/>
+              <a:t>Specs:</a:t>
+            </a:r>
+          </a:p>
+          <a:p>
+            <a:pPr lvl="1"/>
+            <a:r>
+              <a:rPr lang="en-US" b="1" dirty="0"/>
+              <a:t>RAM</a:t>
+            </a:r>
+            <a:r>
+              <a:rPr lang="en-US" dirty="0"/>
+              <a:t>: 2,048 MB</a:t>
+            </a:r>
+          </a:p>
+          <a:p>
+            <a:pPr lvl="1"/>
+            <a:r>
+              <a:rPr lang="en-US" b="1" dirty="0"/>
+              <a:t>Storage</a:t>
+            </a:r>
+            <a:r>
+              <a:rPr lang="en-US" dirty="0"/>
+              <a:t>: 36,000 MB</a:t>
+            </a:r>
+          </a:p>
+          <a:p>
+            <a:pPr lvl="1"/>
+            <a:r>
+              <a:rPr lang="en-US" b="1" dirty="0"/>
+              <a:t>BW</a:t>
+            </a:r>
+            <a:r>
+              <a:rPr lang="en-US" dirty="0"/>
+              <a:t>: 10 Mbps</a:t>
+            </a:r>
+          </a:p>
+          <a:p>
+            <a:pPr lvl="1"/>
+            <a:r>
+              <a:rPr lang="en-US" b="1" dirty="0"/>
+              <a:t>PE</a:t>
+            </a:r>
+            <a:r>
+              <a:rPr lang="en-US" dirty="0"/>
+              <a:t> / Cores (x2): 1,000 MIPS each</a:t>
+            </a:r>
+          </a:p>
+          <a:p>
+            <a:pPr lvl="1"/>
+            <a:r>
+              <a:rPr lang="en-US" b="1" dirty="0"/>
+              <a:t>Active power draw</a:t>
+            </a:r>
+            <a:r>
+              <a:rPr lang="en-US" dirty="0"/>
+              <a:t>: 292 W</a:t>
+            </a:r>
+          </a:p>
+          <a:p>
+            <a:pPr lvl="1"/>
+            <a:r>
+              <a:rPr lang="en-US" b="1" dirty="0"/>
+              <a:t>Idle power draw</a:t>
+            </a:r>
+            <a:r>
+              <a:rPr lang="en-US" dirty="0"/>
+              <a:t>: 204 W</a:t>
+            </a:r>
+          </a:p>
+          <a:p>
+            <a:endParaRPr lang="en-US" dirty="0"/>
           </a:p>
         </p:txBody>
       </p:sp>
-      <p:sp>
-        <p:nvSpPr>
-          <p:cNvPr id="5" name="Content Placeholder 4">
-            <a:extLst>
-              <a:ext uri="{FF2B5EF4-FFF2-40B4-BE49-F238E27FC236}">
-                <a16:creationId xmlns:a16="http://schemas.microsoft.com/office/drawing/2014/main" id="{37C018E2-B9A9-19E9-CB48-F094A3896C7D}"/>
-              </a:ext>
-            </a:extLst>
-          </p:cNvPr>
-          <p:cNvSpPr>
-            <a:spLocks noGrp="1"/>
-          </p:cNvSpPr>
+      <p:pic>
+        <p:nvPicPr>
+          <p:cNvPr id="1026" name="Picture 2" descr="Buy Used HP DL360 G1 Server India | Quality Assured">
+            <a:extLst>
+              <a:ext uri="{FF2B5EF4-FFF2-40B4-BE49-F238E27FC236}">
+                <a16:creationId xmlns:a16="http://schemas.microsoft.com/office/drawing/2014/main" id="{743B2E64-294B-EFB3-9B6D-A69C113783D1}"/>
+              </a:ext>
+            </a:extLst>
+          </p:cNvPr>
+          <p:cNvPicPr>
+            <a:picLocks noGrp="1" noChangeAspect="1" noChangeArrowheads="1"/>
+          </p:cNvPicPr>
           <p:nvPr>
             <p:ph sz="half" idx="2"/>
           </p:nvPr>
-        </p:nvSpPr>
-        <p:spPr/>
-        <p:txBody>
-          <a:bodyPr/>
-          <a:lstStyle/>
-          <a:p>
-            <a:endParaRPr lang="en-US"/>
-          </a:p>
-        </p:txBody>
-      </p:sp>
+        </p:nvPicPr>
+        <p:blipFill>
+          <a:blip r:embed="rId3">
+            <a:extLst>
+              <a:ext uri="{28A0092B-C50C-407E-A947-70E740481C1C}">
+                <a14:useLocalDpi xmlns:a14="http://schemas.microsoft.com/office/drawing/2010/main" val="0"/>
+              </a:ext>
+            </a:extLst>
+          </a:blip>
+          <a:srcRect/>
+          <a:stretch>
+            <a:fillRect/>
+          </a:stretch>
+        </p:blipFill>
+        <p:spPr bwMode="auto">
+          <a:xfrm>
+            <a:off x="6587331" y="1825625"/>
+            <a:ext cx="4351338" cy="4351338"/>
+          </a:xfrm>
+          <a:prstGeom prst="rect">
+            <a:avLst/>
+          </a:prstGeom>
+          <a:noFill/>
+          <a:extLst>
+            <a:ext uri="{909E8E84-426E-40DD-AFC4-6F175D3DCCD1}">
+              <a14:hiddenFill xmlns:a14="http://schemas.microsoft.com/office/drawing/2010/main">
+                <a:solidFill>
+                  <a:srgbClr val="FFFFFF"/>
+                </a:solidFill>
+              </a14:hiddenFill>
+            </a:ext>
+          </a:extLst>
+        </p:spPr>
+      </p:pic>
     </p:spTree>
     <p:extLst>
       <p:ext uri="{BB962C8B-B14F-4D97-AF65-F5344CB8AC3E}">
@@ -8399,12 +8594,12 @@
         </p:nvSpPr>
         <p:spPr/>
         <p:txBody>
-          <a:bodyPr anchor="b"/>
+          <a:bodyPr anchor="ctr"/>
           <a:lstStyle/>
           <a:p>
             <a:r>
               <a:rPr lang="en-US" dirty="0"/>
-              <a:t>Modern Data Center</a:t>
+              <a:t>Methodology - Modern Data Center</a:t>
             </a:r>
           </a:p>
         </p:txBody>
@@ -8427,38 +8622,163 @@
         </p:nvSpPr>
         <p:spPr/>
         <p:txBody>
-          <a:bodyPr/>
+          <a:bodyPr>
+            <a:normAutofit lnSpcReduction="10000"/>
+          </a:bodyPr>
           <a:lstStyle/>
           <a:p>
-            <a:endParaRPr lang="en-US"/>
+            <a:r>
+              <a:rPr lang="en-US" b="1" dirty="0"/>
+              <a:t>HPE ProLiant DL360 Gen10</a:t>
+            </a:r>
+          </a:p>
+          <a:p>
+            <a:pPr lvl="1"/>
+            <a:r>
+              <a:rPr lang="en-US" dirty="0"/>
+              <a:t>Enterprise Server</a:t>
+            </a:r>
+          </a:p>
+          <a:p>
+            <a:pPr lvl="1"/>
+            <a:r>
+              <a:rPr lang="en-US" dirty="0"/>
+              <a:t>Benchmarked in 2017</a:t>
+            </a:r>
+          </a:p>
+          <a:p>
+            <a:r>
+              <a:rPr lang="en-US" dirty="0"/>
+              <a:t>Specs:</a:t>
+            </a:r>
+          </a:p>
+          <a:p>
+            <a:pPr lvl="1"/>
+            <a:r>
+              <a:rPr lang="en-US" b="1" dirty="0"/>
+              <a:t>RAM</a:t>
+            </a:r>
+            <a:r>
+              <a:rPr lang="en-US" dirty="0"/>
+              <a:t>: 98,304 MB</a:t>
+            </a:r>
+          </a:p>
+          <a:p>
+            <a:pPr lvl="1"/>
+            <a:r>
+              <a:rPr lang="en-US" b="1" dirty="0"/>
+              <a:t>Storage</a:t>
+            </a:r>
+            <a:r>
+              <a:rPr lang="en-US" dirty="0"/>
+              <a:t>: 340,000 MB</a:t>
+            </a:r>
+          </a:p>
+          <a:p>
+            <a:pPr lvl="1"/>
+            <a:r>
+              <a:rPr lang="en-US" b="1" dirty="0"/>
+              <a:t>BW</a:t>
+            </a:r>
+            <a:r>
+              <a:rPr lang="en-US" dirty="0"/>
+              <a:t>: 4,000 Mbps</a:t>
+            </a:r>
+          </a:p>
+          <a:p>
+            <a:pPr lvl="1"/>
+            <a:r>
+              <a:rPr lang="en-US" b="1" dirty="0"/>
+              <a:t>PE</a:t>
+            </a:r>
+            <a:r>
+              <a:rPr lang="en-US" dirty="0"/>
+              <a:t> (x56): 2,500 MIPS each </a:t>
+            </a:r>
+            <a:br>
+              <a:rPr lang="en-US" dirty="0"/>
+            </a:br>
+            <a:r>
+              <a:rPr lang="en-US" dirty="0"/>
+              <a:t>(two processors with 28 cores each)</a:t>
+            </a:r>
+          </a:p>
+          <a:p>
+            <a:pPr lvl="1"/>
+            <a:r>
+              <a:rPr lang="en-US" b="1" dirty="0"/>
+              <a:t>Active power draw</a:t>
+            </a:r>
+            <a:r>
+              <a:rPr lang="en-US" dirty="0"/>
+              <a:t>: 451 W</a:t>
+            </a:r>
+          </a:p>
+          <a:p>
+            <a:pPr lvl="1"/>
+            <a:r>
+              <a:rPr lang="en-US" b="1" dirty="0"/>
+              <a:t>Idle power draw</a:t>
+            </a:r>
+            <a:r>
+              <a:rPr lang="en-US" dirty="0"/>
+              <a:t>: 48 W</a:t>
+            </a:r>
+          </a:p>
+          <a:p>
+            <a:endParaRPr lang="en-US" dirty="0"/>
           </a:p>
         </p:txBody>
       </p:sp>
-      <p:sp>
-        <p:nvSpPr>
-          <p:cNvPr id="5" name="Content Placeholder 4">
-            <a:extLst>
-              <a:ext uri="{FF2B5EF4-FFF2-40B4-BE49-F238E27FC236}">
-                <a16:creationId xmlns:a16="http://schemas.microsoft.com/office/drawing/2014/main" id="{7720972F-B353-2E01-215D-2D948E5DA087}"/>
-              </a:ext>
-            </a:extLst>
-          </p:cNvPr>
-          <p:cNvSpPr>
-            <a:spLocks noGrp="1"/>
-          </p:cNvSpPr>
+      <p:pic>
+        <p:nvPicPr>
+          <p:cNvPr id="2050" name="Picture 2">
+            <a:extLst>
+              <a:ext uri="{FF2B5EF4-FFF2-40B4-BE49-F238E27FC236}">
+                <a16:creationId xmlns:a16="http://schemas.microsoft.com/office/drawing/2014/main" id="{A88A8CCB-1592-AFDB-A968-544CC7A36A79}"/>
+              </a:ext>
+            </a:extLst>
+          </p:cNvPr>
+          <p:cNvPicPr>
+            <a:picLocks noGrp="1" noChangeAspect="1" noChangeArrowheads="1"/>
+          </p:cNvPicPr>
           <p:nvPr>
             <p:ph sz="half" idx="2"/>
           </p:nvPr>
-        </p:nvSpPr>
-        <p:spPr/>
-        <p:txBody>
-          <a:bodyPr/>
-          <a:lstStyle/>
-          <a:p>
-            <a:endParaRPr lang="en-US"/>
-          </a:p>
-        </p:txBody>
-      </p:sp>
+        </p:nvPicPr>
+        <p:blipFill>
+          <a:blip r:embed="rId3">
+            <a:extLst>
+              <a:ext uri="{28A0092B-C50C-407E-A947-70E740481C1C}">
+                <a14:useLocalDpi xmlns:a14="http://schemas.microsoft.com/office/drawing/2010/main" val="0"/>
+              </a:ext>
+            </a:extLst>
+          </a:blip>
+          <a:srcRect/>
+          <a:stretch>
+            <a:fillRect/>
+          </a:stretch>
+        </p:blipFill>
+        <p:spPr bwMode="auto">
+          <a:xfrm>
+            <a:off x="6587331" y="1825625"/>
+            <a:ext cx="4351338" cy="4351338"/>
+          </a:xfrm>
+          <a:prstGeom prst="rect">
+            <a:avLst/>
+          </a:prstGeom>
+          <a:noFill/>
+          <a:extLst>
+            <a:ext uri="{909E8E84-426E-40DD-AFC4-6F175D3DCCD1}">
+              <a14:hiddenFill xmlns:a14="http://schemas.microsoft.com/office/drawing/2010/main">
+                <a:solidFill>
+                  <a:srgbClr val="FFFFFF"/>
+                </a:solidFill>
+              </a14:hiddenFill>
+            </a:ext>
+          </a:extLst>
+        </p:spPr>
+      </p:pic>
     </p:spTree>
     <p:extLst>
       <p:ext uri="{BB962C8B-B14F-4D97-AF65-F5344CB8AC3E}">
@@ -8540,12 +8860,12 @@
         </p:nvSpPr>
         <p:spPr/>
         <p:txBody>
-          <a:bodyPr anchor="b"/>
+          <a:bodyPr anchor="ctr"/>
           <a:lstStyle/>
           <a:p>
             <a:r>
               <a:rPr lang="en-US" dirty="0"/>
-              <a:t>AI Data Center</a:t>
+              <a:t>Methodology - AI Data Center</a:t>
             </a:r>
           </a:p>
         </p:txBody>
@@ -8568,38 +8888,160 @@
         </p:nvSpPr>
         <p:spPr/>
         <p:txBody>
-          <a:bodyPr/>
+          <a:bodyPr>
+            <a:normAutofit lnSpcReduction="10000"/>
+          </a:bodyPr>
           <a:lstStyle/>
           <a:p>
-            <a:endParaRPr lang="en-US"/>
+            <a:r>
+              <a:rPr lang="en-US" b="1" dirty="0"/>
+              <a:t>HPE ProLiant DL380a Gen11</a:t>
+            </a:r>
+          </a:p>
+          <a:p>
+            <a:pPr lvl="1"/>
+            <a:r>
+              <a:rPr lang="en-US" dirty="0"/>
+              <a:t>Enterprise Server</a:t>
+            </a:r>
+          </a:p>
+          <a:p>
+            <a:pPr lvl="1"/>
+            <a:r>
+              <a:rPr lang="en-US" dirty="0"/>
+              <a:t>Benchmarked in 2024</a:t>
+            </a:r>
+          </a:p>
+          <a:p>
+            <a:r>
+              <a:rPr lang="en-US" dirty="0"/>
+              <a:t>Specs:</a:t>
+            </a:r>
+          </a:p>
+          <a:p>
+            <a:pPr lvl="1"/>
+            <a:r>
+              <a:rPr lang="en-US" b="1" dirty="0"/>
+              <a:t>RAM</a:t>
+            </a:r>
+            <a:r>
+              <a:rPr lang="en-US" dirty="0"/>
+              <a:t>: 262,144 MB</a:t>
+            </a:r>
+          </a:p>
+          <a:p>
+            <a:pPr lvl="1"/>
+            <a:r>
+              <a:rPr lang="en-US" b="1" dirty="0"/>
+              <a:t>Storage</a:t>
+            </a:r>
+            <a:r>
+              <a:rPr lang="en-US" dirty="0"/>
+              <a:t>: 122,880,000 MB</a:t>
+            </a:r>
+          </a:p>
+          <a:p>
+            <a:pPr lvl="1"/>
+            <a:r>
+              <a:rPr lang="en-US" b="1" dirty="0"/>
+              <a:t>BW</a:t>
+            </a:r>
+            <a:r>
+              <a:rPr lang="en-US" dirty="0"/>
+              <a:t>: 4,000 Mbps</a:t>
+            </a:r>
+          </a:p>
+          <a:p>
+            <a:pPr lvl="1"/>
+            <a:r>
+              <a:rPr lang="en-US" b="1" dirty="0"/>
+              <a:t>PE</a:t>
+            </a:r>
+            <a:r>
+              <a:rPr lang="en-US" dirty="0"/>
+              <a:t> (x128): 15,000 MIPS each </a:t>
+            </a:r>
+            <a:br>
+              <a:rPr lang="en-US" dirty="0"/>
+            </a:br>
+            <a:r>
+              <a:rPr lang="en-US" dirty="0"/>
+              <a:t>(two processors with 64 cores each)</a:t>
+            </a:r>
+          </a:p>
+          <a:p>
+            <a:pPr lvl="1"/>
+            <a:r>
+              <a:rPr lang="en-US" b="1" dirty="0"/>
+              <a:t>Active power draw</a:t>
+            </a:r>
+            <a:r>
+              <a:rPr lang="en-US" dirty="0"/>
+              <a:t>: 736 W</a:t>
+            </a:r>
+          </a:p>
+          <a:p>
+            <a:pPr lvl="1"/>
+            <a:r>
+              <a:rPr lang="en-US" b="1" dirty="0"/>
+              <a:t>Idle power draw</a:t>
+            </a:r>
+            <a:r>
+              <a:rPr lang="en-US" dirty="0"/>
+              <a:t>: 235 W</a:t>
+            </a:r>
           </a:p>
         </p:txBody>
       </p:sp>
-      <p:sp>
-        <p:nvSpPr>
-          <p:cNvPr id="5" name="Content Placeholder 4">
-            <a:extLst>
-              <a:ext uri="{FF2B5EF4-FFF2-40B4-BE49-F238E27FC236}">
-                <a16:creationId xmlns:a16="http://schemas.microsoft.com/office/drawing/2014/main" id="{89F61B43-174B-DA51-7426-0CC142CF442C}"/>
-              </a:ext>
-            </a:extLst>
-          </p:cNvPr>
-          <p:cNvSpPr>
-            <a:spLocks noGrp="1"/>
-          </p:cNvSpPr>
+      <p:pic>
+        <p:nvPicPr>
+          <p:cNvPr id="3074" name="Picture 2" descr="Buy HPE DL380a Gen11 Server Online at Best Price | 24/7 Support">
+            <a:extLst>
+              <a:ext uri="{FF2B5EF4-FFF2-40B4-BE49-F238E27FC236}">
+                <a16:creationId xmlns:a16="http://schemas.microsoft.com/office/drawing/2014/main" id="{6D7F64F6-13BA-5464-EB38-0C48BA8CE8FA}"/>
+              </a:ext>
+            </a:extLst>
+          </p:cNvPr>
+          <p:cNvPicPr>
+            <a:picLocks noGrp="1" noChangeAspect="1" noChangeArrowheads="1"/>
+          </p:cNvPicPr>
           <p:nvPr>
             <p:ph sz="half" idx="2"/>
           </p:nvPr>
-        </p:nvSpPr>
-        <p:spPr/>
-        <p:txBody>
-          <a:bodyPr/>
-          <a:lstStyle/>
-          <a:p>
-            <a:endParaRPr lang="en-US"/>
-          </a:p>
-        </p:txBody>
-      </p:sp>
+        </p:nvPicPr>
+        <p:blipFill>
+          <a:blip r:embed="rId3">
+            <a:extLst>
+              <a:ext uri="{28A0092B-C50C-407E-A947-70E740481C1C}">
+                <a14:useLocalDpi xmlns:a14="http://schemas.microsoft.com/office/drawing/2010/main" val="0"/>
+              </a:ext>
+            </a:extLst>
+          </a:blip>
+          <a:srcRect/>
+          <a:stretch>
+            <a:fillRect/>
+          </a:stretch>
+        </p:blipFill>
+        <p:spPr bwMode="auto">
+          <a:xfrm>
+            <a:off x="6619875" y="1858169"/>
+            <a:ext cx="4286250" cy="4286250"/>
+          </a:xfrm>
+          <a:prstGeom prst="rect">
+            <a:avLst/>
+          </a:prstGeom>
+          <a:noFill/>
+          <a:extLst>
+            <a:ext uri="{909E8E84-426E-40DD-AFC4-6F175D3DCCD1}">
+              <a14:hiddenFill xmlns:a14="http://schemas.microsoft.com/office/drawing/2010/main">
+                <a:solidFill>
+                  <a:srgbClr val="FFFFFF"/>
+                </a:solidFill>
+              </a14:hiddenFill>
+            </a:ext>
+          </a:extLst>
+        </p:spPr>
+      </p:pic>
     </p:spTree>
     <p:extLst>
       <p:ext uri="{BB962C8B-B14F-4D97-AF65-F5344CB8AC3E}">
